--- a/01-delivered-case-studies/taash-tax-automation/Deck/Executive_Deck.pptx
+++ b/01-delivered-case-studies/taash-tax-automation/Deck/Executive_Deck.pptx
@@ -1680,7 +1680,7 @@
                 <a:ea typeface="Arial" pitchFamily="34" charset="-122"/>
                 <a:cs typeface="Arial" pitchFamily="34" charset="-120"/>
               </a:rPr>
-              <a:t>Founder and Product Business Analyst</a:t>
+              <a:t>Business Analyst (Contract)</a:t>
             </a:r>
             <a:endParaRPr lang="en-US" sz="1400" dirty="0"/>
           </a:p>
@@ -1893,6 +1893,10 @@
             <a:prstDash val="solid"/>
           </a:ln>
         </p:spPr>
+        <p:txBody>
+          <a:bodyPr/>
+          <a:p/>
+        </p:txBody>
       </p:sp>
       <p:sp>
         <p:nvSpPr>
@@ -2035,6 +2039,10 @@
             <a:prstDash val="solid"/>
           </a:ln>
         </p:spPr>
+        <p:txBody>
+          <a:bodyPr/>
+          <a:p/>
+        </p:txBody>
       </p:sp>
       <p:sp>
         <p:nvSpPr>
@@ -2138,6 +2146,10 @@
             <a:prstDash val="solid"/>
           </a:ln>
         </p:spPr>
+        <p:txBody>
+          <a:bodyPr/>
+          <a:p/>
+        </p:txBody>
       </p:sp>
       <p:sp>
         <p:nvSpPr>
@@ -2241,6 +2253,10 @@
             <a:prstDash val="solid"/>
           </a:ln>
         </p:spPr>
+        <p:txBody>
+          <a:bodyPr/>
+          <a:p/>
+        </p:txBody>
       </p:sp>
       <p:sp>
         <p:nvSpPr>
@@ -5914,6 +5930,10 @@
             <a:prstDash val="solid"/>
           </a:ln>
         </p:spPr>
+        <p:txBody>
+          <a:bodyPr/>
+          <a:p/>
+        </p:txBody>
       </p:sp>
       <p:sp>
         <p:nvSpPr>
@@ -6058,6 +6078,10 @@
             <a:prstDash val="solid"/>
           </a:ln>
         </p:spPr>
+        <p:txBody>
+          <a:bodyPr/>
+          <a:p/>
+        </p:txBody>
       </p:sp>
       <p:sp>
         <p:nvSpPr>
@@ -6202,6 +6226,10 @@
             <a:prstDash val="solid"/>
           </a:ln>
         </p:spPr>
+        <p:txBody>
+          <a:bodyPr/>
+          <a:p/>
+        </p:txBody>
       </p:sp>
       <p:sp>
         <p:nvSpPr>
@@ -6346,6 +6374,10 @@
             <a:prstDash val="solid"/>
           </a:ln>
         </p:spPr>
+        <p:txBody>
+          <a:bodyPr/>
+          <a:p/>
+        </p:txBody>
       </p:sp>
       <p:sp>
         <p:nvSpPr>
